--- a/class/cloud_infra_mgmt/03주차_Docker심화/01_강의자료/2차시_계정준비와Flask앱빌드.pptx
+++ b/class/cloud_infra_mgmt/03주차_Docker심화/01_강의자료/2차시_계정준비와Flask앱빌드.pptx
@@ -5206,7 +5206,7 @@
           <a:p>
             <a:pPr>
               <a:lnSpc>
-                <a:spcPct val="115000"/>
+                <a:spcPct val="149500"/>
               </a:lnSpc>
             </a:pPr>
             <a:r>
@@ -5231,7 +5231,7 @@
           <a:p>
             <a:pPr>
               <a:lnSpc>
-                <a:spcPct val="115000"/>
+                <a:spcPct val="149500"/>
               </a:lnSpc>
             </a:pPr>
             <a:r>
@@ -5256,7 +5256,7 @@
           <a:p>
             <a:pPr>
               <a:lnSpc>
-                <a:spcPct val="115000"/>
+                <a:spcPct val="149500"/>
               </a:lnSpc>
             </a:pPr>
             <a:r>
@@ -5281,7 +5281,7 @@
           <a:p>
             <a:pPr>
               <a:lnSpc>
-                <a:spcPct val="115000"/>
+                <a:spcPct val="149500"/>
               </a:lnSpc>
             </a:pPr>
             <a:r>
@@ -5672,7 +5672,7 @@
           <a:p>
             <a:pPr>
               <a:lnSpc>
-                <a:spcPct val="115000"/>
+                <a:spcPct val="149500"/>
               </a:lnSpc>
             </a:pPr>
             <a:r>
@@ -5697,7 +5697,7 @@
           <a:p>
             <a:pPr>
               <a:lnSpc>
-                <a:spcPct val="115000"/>
+                <a:spcPct val="149500"/>
               </a:lnSpc>
             </a:pPr>
             <a:r>
@@ -5722,7 +5722,7 @@
           <a:p>
             <a:pPr>
               <a:lnSpc>
-                <a:spcPct val="115000"/>
+                <a:spcPct val="149500"/>
               </a:lnSpc>
             </a:pPr>
             <a:r>
@@ -5747,7 +5747,7 @@
           <a:p>
             <a:pPr>
               <a:lnSpc>
-                <a:spcPct val="115000"/>
+                <a:spcPct val="149500"/>
               </a:lnSpc>
             </a:pPr>
             <a:r>
@@ -6996,16 +6996,104 @@
       </p:sp>
       <p:sp>
         <p:nvSpPr>
-          <p:cNvPr id="7" name="Isosceles Triangle 6"/>
+          <p:cNvPr id="7" name="Rectangle 6"/>
           <p:cNvSpPr/>
           <p:nvPr/>
         </p:nvSpPr>
         <p:spPr>
-          <a:xfrm rot="5400000">
-            <a:off x="3495751" y="1673352"/>
-            <a:ext cx="146304" cy="146304"/>
-          </a:xfrm>
-          <a:prstGeom prst="triangle">
+          <a:xfrm>
+            <a:off x="5096865" y="1730959"/>
+            <a:ext cx="1995220" cy="31089"/>
+          </a:xfrm>
+          <a:prstGeom prst="rect">
+            <a:avLst/>
+          </a:prstGeom>
+          <a:solidFill>
+            <a:srgbClr val="14B8A6"/>
+          </a:solidFill>
+          <a:ln>
+            <a:noFill/>
+          </a:ln>
+          <a:effectLst/>
+        </p:spPr>
+        <p:style>
+          <a:lnRef idx="1">
+            <a:schemeClr val="accent1"/>
+          </a:lnRef>
+          <a:fillRef idx="3">
+            <a:schemeClr val="accent1"/>
+          </a:fillRef>
+          <a:effectRef idx="2">
+            <a:schemeClr val="accent1"/>
+          </a:effectRef>
+          <a:fontRef idx="minor">
+            <a:schemeClr val="lt1"/>
+          </a:fontRef>
+        </p:style>
+        <p:txBody>
+          <a:bodyPr rtlCol="0" anchor="ctr"/>
+          <a:lstStyle/>
+          <a:p>
+            <a:pPr algn="ctr"/>
+          </a:p>
+        </p:txBody>
+      </p:sp>
+      <p:sp>
+        <p:nvSpPr>
+          <p:cNvPr id="8" name="Rectangle 7"/>
+          <p:cNvSpPr/>
+          <p:nvPr/>
+        </p:nvSpPr>
+        <p:spPr>
+          <a:xfrm>
+            <a:off x="7622438" y="1730959"/>
+            <a:ext cx="1995220" cy="31089"/>
+          </a:xfrm>
+          <a:prstGeom prst="rect">
+            <a:avLst/>
+          </a:prstGeom>
+          <a:solidFill>
+            <a:srgbClr val="14B8A6"/>
+          </a:solidFill>
+          <a:ln>
+            <a:noFill/>
+          </a:ln>
+          <a:effectLst/>
+        </p:spPr>
+        <p:style>
+          <a:lnRef idx="1">
+            <a:schemeClr val="accent1"/>
+          </a:lnRef>
+          <a:fillRef idx="3">
+            <a:schemeClr val="accent1"/>
+          </a:fillRef>
+          <a:effectRef idx="2">
+            <a:schemeClr val="accent1"/>
+          </a:effectRef>
+          <a:fontRef idx="minor">
+            <a:schemeClr val="lt1"/>
+          </a:fontRef>
+        </p:style>
+        <p:txBody>
+          <a:bodyPr rtlCol="0" anchor="ctr"/>
+          <a:lstStyle/>
+          <a:p>
+            <a:pPr algn="ctr"/>
+          </a:p>
+        </p:txBody>
+      </p:sp>
+      <p:sp>
+        <p:nvSpPr>
+          <p:cNvPr id="9" name="Oval 8"/>
+          <p:cNvSpPr/>
+          <p:nvPr/>
+        </p:nvSpPr>
+        <p:spPr>
+          <a:xfrm>
+            <a:off x="2040940" y="1481328"/>
+            <a:ext cx="530352" cy="530352"/>
+          </a:xfrm>
+          <a:prstGeom prst="ellipse">
             <a:avLst/>
           </a:prstGeom>
           <a:solidFill>
@@ -7040,227 +7128,7 @@
       </p:sp>
       <p:sp>
         <p:nvSpPr>
-          <p:cNvPr id="8" name="Rectangle 7"/>
-          <p:cNvSpPr/>
-          <p:nvPr/>
-        </p:nvSpPr>
-        <p:spPr>
-          <a:xfrm>
-            <a:off x="5096865" y="1730959"/>
-            <a:ext cx="1995220" cy="31089"/>
-          </a:xfrm>
-          <a:prstGeom prst="rect">
-            <a:avLst/>
-          </a:prstGeom>
-          <a:solidFill>
-            <a:srgbClr val="14B8A6"/>
-          </a:solidFill>
-          <a:ln>
-            <a:noFill/>
-          </a:ln>
-          <a:effectLst/>
-        </p:spPr>
-        <p:style>
-          <a:lnRef idx="1">
-            <a:schemeClr val="accent1"/>
-          </a:lnRef>
-          <a:fillRef idx="3">
-            <a:schemeClr val="accent1"/>
-          </a:fillRef>
-          <a:effectRef idx="2">
-            <a:schemeClr val="accent1"/>
-          </a:effectRef>
-          <a:fontRef idx="minor">
-            <a:schemeClr val="lt1"/>
-          </a:fontRef>
-        </p:style>
-        <p:txBody>
-          <a:bodyPr rtlCol="0" anchor="ctr"/>
-          <a:lstStyle/>
-          <a:p>
-            <a:pPr algn="ctr"/>
-          </a:p>
-        </p:txBody>
-      </p:sp>
-      <p:sp>
-        <p:nvSpPr>
-          <p:cNvPr id="9" name="Isosceles Triangle 8"/>
-          <p:cNvSpPr/>
-          <p:nvPr/>
-        </p:nvSpPr>
-        <p:spPr>
-          <a:xfrm rot="5400000">
-            <a:off x="6021324" y="1673352"/>
-            <a:ext cx="146304" cy="146304"/>
-          </a:xfrm>
-          <a:prstGeom prst="triangle">
-            <a:avLst/>
-          </a:prstGeom>
-          <a:solidFill>
-            <a:srgbClr val="0D9488"/>
-          </a:solidFill>
-          <a:ln>
-            <a:noFill/>
-          </a:ln>
-          <a:effectLst/>
-        </p:spPr>
-        <p:style>
-          <a:lnRef idx="1">
-            <a:schemeClr val="accent1"/>
-          </a:lnRef>
-          <a:fillRef idx="3">
-            <a:schemeClr val="accent1"/>
-          </a:fillRef>
-          <a:effectRef idx="2">
-            <a:schemeClr val="accent1"/>
-          </a:effectRef>
-          <a:fontRef idx="minor">
-            <a:schemeClr val="lt1"/>
-          </a:fontRef>
-        </p:style>
-        <p:txBody>
-          <a:bodyPr rtlCol="0" anchor="ctr"/>
-          <a:lstStyle/>
-          <a:p>
-            <a:pPr algn="ctr"/>
-          </a:p>
-        </p:txBody>
-      </p:sp>
-      <p:sp>
-        <p:nvSpPr>
-          <p:cNvPr id="10" name="Rectangle 9"/>
-          <p:cNvSpPr/>
-          <p:nvPr/>
-        </p:nvSpPr>
-        <p:spPr>
-          <a:xfrm>
-            <a:off x="7622438" y="1730959"/>
-            <a:ext cx="1995220" cy="31089"/>
-          </a:xfrm>
-          <a:prstGeom prst="rect">
-            <a:avLst/>
-          </a:prstGeom>
-          <a:solidFill>
-            <a:srgbClr val="14B8A6"/>
-          </a:solidFill>
-          <a:ln>
-            <a:noFill/>
-          </a:ln>
-          <a:effectLst/>
-        </p:spPr>
-        <p:style>
-          <a:lnRef idx="1">
-            <a:schemeClr val="accent1"/>
-          </a:lnRef>
-          <a:fillRef idx="3">
-            <a:schemeClr val="accent1"/>
-          </a:fillRef>
-          <a:effectRef idx="2">
-            <a:schemeClr val="accent1"/>
-          </a:effectRef>
-          <a:fontRef idx="minor">
-            <a:schemeClr val="lt1"/>
-          </a:fontRef>
-        </p:style>
-        <p:txBody>
-          <a:bodyPr rtlCol="0" anchor="ctr"/>
-          <a:lstStyle/>
-          <a:p>
-            <a:pPr algn="ctr"/>
-          </a:p>
-        </p:txBody>
-      </p:sp>
-      <p:sp>
-        <p:nvSpPr>
-          <p:cNvPr id="11" name="Isosceles Triangle 10"/>
-          <p:cNvSpPr/>
-          <p:nvPr/>
-        </p:nvSpPr>
-        <p:spPr>
-          <a:xfrm rot="5400000">
-            <a:off x="8546896" y="1673352"/>
-            <a:ext cx="146304" cy="146304"/>
-          </a:xfrm>
-          <a:prstGeom prst="triangle">
-            <a:avLst/>
-          </a:prstGeom>
-          <a:solidFill>
-            <a:srgbClr val="0D9488"/>
-          </a:solidFill>
-          <a:ln>
-            <a:noFill/>
-          </a:ln>
-          <a:effectLst/>
-        </p:spPr>
-        <p:style>
-          <a:lnRef idx="1">
-            <a:schemeClr val="accent1"/>
-          </a:lnRef>
-          <a:fillRef idx="3">
-            <a:schemeClr val="accent1"/>
-          </a:fillRef>
-          <a:effectRef idx="2">
-            <a:schemeClr val="accent1"/>
-          </a:effectRef>
-          <a:fontRef idx="minor">
-            <a:schemeClr val="lt1"/>
-          </a:fontRef>
-        </p:style>
-        <p:txBody>
-          <a:bodyPr rtlCol="0" anchor="ctr"/>
-          <a:lstStyle/>
-          <a:p>
-            <a:pPr algn="ctr"/>
-          </a:p>
-        </p:txBody>
-      </p:sp>
-      <p:sp>
-        <p:nvSpPr>
-          <p:cNvPr id="12" name="Oval 11"/>
-          <p:cNvSpPr/>
-          <p:nvPr/>
-        </p:nvSpPr>
-        <p:spPr>
-          <a:xfrm>
-            <a:off x="2040940" y="1481328"/>
-            <a:ext cx="530352" cy="530352"/>
-          </a:xfrm>
-          <a:prstGeom prst="ellipse">
-            <a:avLst/>
-          </a:prstGeom>
-          <a:solidFill>
-            <a:srgbClr val="0D9488"/>
-          </a:solidFill>
-          <a:ln>
-            <a:noFill/>
-          </a:ln>
-          <a:effectLst/>
-        </p:spPr>
-        <p:style>
-          <a:lnRef idx="1">
-            <a:schemeClr val="accent1"/>
-          </a:lnRef>
-          <a:fillRef idx="3">
-            <a:schemeClr val="accent1"/>
-          </a:fillRef>
-          <a:effectRef idx="2">
-            <a:schemeClr val="accent1"/>
-          </a:effectRef>
-          <a:fontRef idx="minor">
-            <a:schemeClr val="lt1"/>
-          </a:fontRef>
-        </p:style>
-        <p:txBody>
-          <a:bodyPr rtlCol="0" anchor="ctr"/>
-          <a:lstStyle/>
-          <a:p>
-            <a:pPr algn="ctr"/>
-          </a:p>
-        </p:txBody>
-      </p:sp>
-      <p:sp>
-        <p:nvSpPr>
-          <p:cNvPr id="13" name="TextBox 12"/>
+          <p:cNvPr id="10" name="TextBox 9"/>
           <p:cNvSpPr txBox="1"/>
           <p:nvPr/>
         </p:nvSpPr>
@@ -7295,7 +7163,7 @@
       </p:sp>
       <p:sp>
         <p:nvSpPr>
-          <p:cNvPr id="14" name="Rounded Rectangle 13"/>
+          <p:cNvPr id="11" name="Rounded Rectangle 10"/>
           <p:cNvSpPr/>
           <p:nvPr/>
         </p:nvSpPr>
@@ -7343,7 +7211,7 @@
       </p:sp>
       <p:sp>
         <p:nvSpPr>
-          <p:cNvPr id="15" name="TextBox 14"/>
+          <p:cNvPr id="12" name="TextBox 11"/>
           <p:cNvSpPr txBox="1"/>
           <p:nvPr/>
         </p:nvSpPr>
@@ -7378,7 +7246,7 @@
       </p:sp>
       <p:sp>
         <p:nvSpPr>
-          <p:cNvPr id="16" name="TextBox 15"/>
+          <p:cNvPr id="13" name="TextBox 12"/>
           <p:cNvSpPr txBox="1"/>
           <p:nvPr/>
         </p:nvSpPr>
@@ -7417,7 +7285,7 @@
       </p:sp>
       <p:sp>
         <p:nvSpPr>
-          <p:cNvPr id="17" name="Oval 16"/>
+          <p:cNvPr id="14" name="Oval 13"/>
           <p:cNvSpPr/>
           <p:nvPr/>
         </p:nvSpPr>
@@ -7461,7 +7329,7 @@
       </p:sp>
       <p:sp>
         <p:nvSpPr>
-          <p:cNvPr id="18" name="TextBox 17"/>
+          <p:cNvPr id="15" name="TextBox 14"/>
           <p:cNvSpPr txBox="1"/>
           <p:nvPr/>
         </p:nvSpPr>
@@ -7496,7 +7364,7 @@
       </p:sp>
       <p:sp>
         <p:nvSpPr>
-          <p:cNvPr id="19" name="Rounded Rectangle 18"/>
+          <p:cNvPr id="16" name="Rounded Rectangle 15"/>
           <p:cNvSpPr/>
           <p:nvPr/>
         </p:nvSpPr>
@@ -7544,7 +7412,7 @@
       </p:sp>
       <p:sp>
         <p:nvSpPr>
-          <p:cNvPr id="20" name="TextBox 19"/>
+          <p:cNvPr id="17" name="TextBox 16"/>
           <p:cNvSpPr txBox="1"/>
           <p:nvPr/>
         </p:nvSpPr>
@@ -7579,7 +7447,7 @@
       </p:sp>
       <p:sp>
         <p:nvSpPr>
-          <p:cNvPr id="21" name="TextBox 20"/>
+          <p:cNvPr id="18" name="TextBox 17"/>
           <p:cNvSpPr txBox="1"/>
           <p:nvPr/>
         </p:nvSpPr>
@@ -7618,7 +7486,7 @@
       </p:sp>
       <p:sp>
         <p:nvSpPr>
-          <p:cNvPr id="22" name="Oval 21"/>
+          <p:cNvPr id="19" name="Oval 18"/>
           <p:cNvSpPr/>
           <p:nvPr/>
         </p:nvSpPr>
@@ -7662,7 +7530,7 @@
       </p:sp>
       <p:sp>
         <p:nvSpPr>
-          <p:cNvPr id="23" name="TextBox 22"/>
+          <p:cNvPr id="20" name="TextBox 19"/>
           <p:cNvSpPr txBox="1"/>
           <p:nvPr/>
         </p:nvSpPr>
@@ -7697,7 +7565,7 @@
       </p:sp>
       <p:sp>
         <p:nvSpPr>
-          <p:cNvPr id="24" name="Rounded Rectangle 23"/>
+          <p:cNvPr id="21" name="Rounded Rectangle 20"/>
           <p:cNvSpPr/>
           <p:nvPr/>
         </p:nvSpPr>
@@ -7745,7 +7613,7 @@
       </p:sp>
       <p:sp>
         <p:nvSpPr>
-          <p:cNvPr id="25" name="TextBox 24"/>
+          <p:cNvPr id="22" name="TextBox 21"/>
           <p:cNvSpPr txBox="1"/>
           <p:nvPr/>
         </p:nvSpPr>
@@ -7780,7 +7648,7 @@
       </p:sp>
       <p:sp>
         <p:nvSpPr>
-          <p:cNvPr id="26" name="TextBox 25"/>
+          <p:cNvPr id="23" name="TextBox 22"/>
           <p:cNvSpPr txBox="1"/>
           <p:nvPr/>
         </p:nvSpPr>
@@ -7819,7 +7687,7 @@
       </p:sp>
       <p:sp>
         <p:nvSpPr>
-          <p:cNvPr id="27" name="Oval 26"/>
+          <p:cNvPr id="24" name="Oval 23"/>
           <p:cNvSpPr/>
           <p:nvPr/>
         </p:nvSpPr>
@@ -7863,7 +7731,7 @@
       </p:sp>
       <p:sp>
         <p:nvSpPr>
-          <p:cNvPr id="28" name="TextBox 27"/>
+          <p:cNvPr id="25" name="TextBox 24"/>
           <p:cNvSpPr txBox="1"/>
           <p:nvPr/>
         </p:nvSpPr>
@@ -7898,7 +7766,7 @@
       </p:sp>
       <p:sp>
         <p:nvSpPr>
-          <p:cNvPr id="29" name="Rounded Rectangle 28"/>
+          <p:cNvPr id="26" name="Rounded Rectangle 25"/>
           <p:cNvSpPr/>
           <p:nvPr/>
         </p:nvSpPr>
@@ -7946,7 +7814,7 @@
       </p:sp>
       <p:sp>
         <p:nvSpPr>
-          <p:cNvPr id="30" name="TextBox 29"/>
+          <p:cNvPr id="27" name="TextBox 26"/>
           <p:cNvSpPr txBox="1"/>
           <p:nvPr/>
         </p:nvSpPr>
@@ -7981,7 +7849,7 @@
       </p:sp>
       <p:sp>
         <p:nvSpPr>
-          <p:cNvPr id="31" name="TextBox 30"/>
+          <p:cNvPr id="28" name="TextBox 27"/>
           <p:cNvSpPr txBox="1"/>
           <p:nvPr/>
         </p:nvSpPr>
@@ -8020,7 +7888,7 @@
       </p:sp>
       <p:sp>
         <p:nvSpPr>
-          <p:cNvPr id="32" name="TextBox 31"/>
+          <p:cNvPr id="29" name="TextBox 28"/>
           <p:cNvSpPr txBox="1"/>
           <p:nvPr/>
         </p:nvSpPr>
@@ -8055,7 +7923,7 @@
       </p:sp>
       <p:sp>
         <p:nvSpPr>
-          <p:cNvPr id="33" name="TextBox 32"/>
+          <p:cNvPr id="30" name="TextBox 29"/>
           <p:cNvSpPr txBox="1"/>
           <p:nvPr/>
         </p:nvSpPr>
@@ -8090,7 +7958,7 @@
       </p:sp>
       <p:sp>
         <p:nvSpPr>
-          <p:cNvPr id="34" name="Rectangle 33"/>
+          <p:cNvPr id="31" name="Rectangle 30"/>
           <p:cNvSpPr/>
           <p:nvPr/>
         </p:nvSpPr>
@@ -8614,7 +8482,7 @@
           <a:p>
             <a:pPr>
               <a:lnSpc>
-                <a:spcPct val="115000"/>
+                <a:spcPct val="149500"/>
               </a:lnSpc>
             </a:pPr>
             <a:r>
@@ -8630,7 +8498,7 @@
           <a:p>
             <a:pPr>
               <a:lnSpc>
-                <a:spcPct val="115000"/>
+                <a:spcPct val="149500"/>
               </a:lnSpc>
             </a:pPr>
             <a:r>
@@ -8646,7 +8514,7 @@
           <a:p>
             <a:pPr>
               <a:lnSpc>
-                <a:spcPct val="115000"/>
+                <a:spcPct val="149500"/>
               </a:lnSpc>
             </a:pPr>
             <a:r>
@@ -8662,7 +8530,7 @@
           <a:p>
             <a:pPr>
               <a:lnSpc>
-                <a:spcPct val="115000"/>
+                <a:spcPct val="149500"/>
               </a:lnSpc>
             </a:pPr>
             <a:r>
@@ -9044,7 +8912,7 @@
           <a:p>
             <a:pPr>
               <a:lnSpc>
-                <a:spcPct val="115000"/>
+                <a:spcPct val="149500"/>
               </a:lnSpc>
             </a:pPr>
             <a:r>
@@ -9060,7 +8928,7 @@
           <a:p>
             <a:pPr>
               <a:lnSpc>
-                <a:spcPct val="115000"/>
+                <a:spcPct val="149500"/>
               </a:lnSpc>
             </a:pPr>
             <a:r>
@@ -9076,7 +8944,7 @@
           <a:p>
             <a:pPr>
               <a:lnSpc>
-                <a:spcPct val="115000"/>
+                <a:spcPct val="149500"/>
               </a:lnSpc>
             </a:pPr>
             <a:r>
@@ -9092,7 +8960,7 @@
           <a:p>
             <a:pPr>
               <a:lnSpc>
-                <a:spcPct val="115000"/>
+                <a:spcPct val="149500"/>
               </a:lnSpc>
             </a:pPr>
             <a:r>
@@ -9703,7 +9571,7 @@
           <a:p>
             <a:pPr>
               <a:lnSpc>
-                <a:spcPct val="115000"/>
+                <a:spcPct val="149500"/>
               </a:lnSpc>
             </a:pPr>
             <a:r>
@@ -9728,7 +9596,7 @@
           <a:p>
             <a:pPr>
               <a:lnSpc>
-                <a:spcPct val="115000"/>
+                <a:spcPct val="149500"/>
               </a:lnSpc>
             </a:pPr>
             <a:r>
@@ -9753,7 +9621,7 @@
           <a:p>
             <a:pPr>
               <a:lnSpc>
-                <a:spcPct val="115000"/>
+                <a:spcPct val="149500"/>
               </a:lnSpc>
             </a:pPr>
             <a:r>
@@ -10144,7 +10012,7 @@
           <a:p>
             <a:pPr>
               <a:lnSpc>
-                <a:spcPct val="115000"/>
+                <a:spcPct val="149500"/>
               </a:lnSpc>
             </a:pPr>
             <a:r>
@@ -10169,7 +10037,7 @@
           <a:p>
             <a:pPr>
               <a:lnSpc>
-                <a:spcPct val="115000"/>
+                <a:spcPct val="149500"/>
               </a:lnSpc>
             </a:pPr>
             <a:r>
@@ -10194,7 +10062,7 @@
           <a:p>
             <a:pPr>
               <a:lnSpc>
-                <a:spcPct val="115000"/>
+                <a:spcPct val="149500"/>
               </a:lnSpc>
             </a:pPr>
             <a:r>
@@ -10219,7 +10087,7 @@
           <a:p>
             <a:pPr>
               <a:lnSpc>
-                <a:spcPct val="115000"/>
+                <a:spcPct val="149500"/>
               </a:lnSpc>
             </a:pPr>
             <a:r>
@@ -10244,7 +10112,7 @@
           <a:p>
             <a:pPr>
               <a:lnSpc>
-                <a:spcPct val="115000"/>
+                <a:spcPct val="149500"/>
               </a:lnSpc>
             </a:pPr>
             <a:r>
@@ -10269,7 +10137,7 @@
           <a:p>
             <a:pPr>
               <a:lnSpc>
-                <a:spcPct val="115000"/>
+                <a:spcPct val="149500"/>
               </a:lnSpc>
             </a:pPr>
             <a:r>

--- a/class/cloud_infra_mgmt/03주차_Docker심화/01_강의자료/2차시_계정준비와Flask앱빌드.pptx
+++ b/class/cloud_infra_mgmt/03주차_Docker심화/01_강의자료/2차시_계정준비와Flask앱빌드.pptx
@@ -4830,6 +4830,8 @@
                   <a:srgbClr val="14B8A6"/>
                 </a:solidFill>
                 <a:latin typeface="맑은 고딕"/>
+                <a:ea typeface="맑은 고딕"/>
+                <a:cs typeface="맑은 고딕"/>
               </a:rPr>
               <a:t>클라우드인프라관리  ·  3주차 2차시</a:t>
             </a:r>
@@ -4865,6 +4867,8 @@
                   <a:srgbClr val="FFFFFF"/>
                 </a:solidFill>
                 <a:latin typeface="맑은 고딕"/>
+                <a:ea typeface="맑은 고딕"/>
+                <a:cs typeface="맑은 고딕"/>
               </a:rPr>
               <a:t>계정 준비와 나만의</a:t>
             </a:r>
@@ -4877,6 +4881,8 @@
                   <a:srgbClr val="FFFFFF"/>
                 </a:solidFill>
                 <a:latin typeface="맑은 고딕"/>
+                <a:ea typeface="맑은 고딕"/>
+                <a:cs typeface="맑은 고딕"/>
               </a:rPr>
               <a:t>Flask 앱 이미지 빌드</a:t>
             </a:r>
@@ -4912,6 +4918,8 @@
                   <a:srgbClr val="C9D3E6"/>
                 </a:solidFill>
                 <a:latin typeface="맑은 고딕"/>
+                <a:ea typeface="맑은 고딕"/>
+                <a:cs typeface="맑은 고딕"/>
               </a:rPr>
               <a:t>GitHub · Docker Hub 가입 → Dockerfile 작성</a:t>
             </a:r>
@@ -4947,6 +4955,8 @@
                   <a:srgbClr val="FFFFFF"/>
                 </a:solidFill>
                 <a:latin typeface="맑은 고딕"/>
+                <a:ea typeface="맑은 고딕"/>
+                <a:cs typeface="맑은 고딕"/>
               </a:rPr>
               <a:t>영남이공대학교 김지윤교수</a:t>
             </a:r>
@@ -5106,6 +5116,8 @@
                   <a:srgbClr val="14213D"/>
                 </a:solidFill>
                 <a:latin typeface="맑은 고딕"/>
+                <a:ea typeface="맑은 고딕"/>
+                <a:cs typeface="맑은 고딕"/>
               </a:rPr>
               <a:t>02</a:t>
             </a:r>
@@ -5141,6 +5153,8 @@
                   <a:srgbClr val="14B8A6"/>
                 </a:solidFill>
                 <a:latin typeface="맑은 고딕"/>
+                <a:ea typeface="맑은 고딕"/>
+                <a:cs typeface="맑은 고딕"/>
               </a:rPr>
               <a:t>실습 안내</a:t>
             </a:r>
@@ -5176,6 +5190,8 @@
                   <a:srgbClr val="FFFFFF"/>
                 </a:solidFill>
                 <a:latin typeface="맑은 고딕"/>
+                <a:ea typeface="맑은 고딕"/>
+                <a:cs typeface="맑은 고딕"/>
               </a:rPr>
               <a:t>Killercoda — Flask 앱 빌드</a:t>
             </a:r>
@@ -5215,6 +5231,8 @@
                   <a:srgbClr val="0D9488"/>
                 </a:solidFill>
                 <a:latin typeface="맑은 고딕"/>
+                <a:ea typeface="맑은 고딕"/>
+                <a:cs typeface="맑은 고딕"/>
               </a:rPr>
               <a:t>●  </a:t>
             </a:r>
@@ -5224,6 +5242,8 @@
                   <a:srgbClr val="222733"/>
                 </a:solidFill>
                 <a:latin typeface="맑은 고딕"/>
+                <a:ea typeface="맑은 고딕"/>
+                <a:cs typeface="맑은 고딕"/>
               </a:rPr>
               <a:t>app.py, Dockerfile 두 파일 작성</a:t>
             </a:r>
@@ -5240,6 +5260,8 @@
                   <a:srgbClr val="0D9488"/>
                 </a:solidFill>
                 <a:latin typeface="맑은 고딕"/>
+                <a:ea typeface="맑은 고딕"/>
+                <a:cs typeface="맑은 고딕"/>
               </a:rPr>
               <a:t>●  </a:t>
             </a:r>
@@ -5249,6 +5271,8 @@
                   <a:srgbClr val="222733"/>
                 </a:solidFill>
                 <a:latin typeface="맑은 고딕"/>
+                <a:ea typeface="맑은 고딕"/>
+                <a:cs typeface="맑은 고딕"/>
               </a:rPr>
               <a:t>docker build -t myflask:v1 .</a:t>
             </a:r>
@@ -5265,6 +5289,8 @@
                   <a:srgbClr val="0D9488"/>
                 </a:solidFill>
                 <a:latin typeface="맑은 고딕"/>
+                <a:ea typeface="맑은 고딕"/>
+                <a:cs typeface="맑은 고딕"/>
               </a:rPr>
               <a:t>●  </a:t>
             </a:r>
@@ -5274,6 +5300,8 @@
                   <a:srgbClr val="222733"/>
                 </a:solidFill>
                 <a:latin typeface="맑은 고딕"/>
+                <a:ea typeface="맑은 고딕"/>
+                <a:cs typeface="맑은 고딕"/>
               </a:rPr>
               <a:t>docker run -d -p 5000:5000 myflask:v1</a:t>
             </a:r>
@@ -5290,6 +5318,8 @@
                   <a:srgbClr val="0D9488"/>
                 </a:solidFill>
                 <a:latin typeface="맑은 고딕"/>
+                <a:ea typeface="맑은 고딕"/>
+                <a:cs typeface="맑은 고딕"/>
               </a:rPr>
               <a:t>●  </a:t>
             </a:r>
@@ -5299,6 +5329,8 @@
                   <a:srgbClr val="222733"/>
                 </a:solidFill>
                 <a:latin typeface="맑은 고딕"/>
+                <a:ea typeface="맑은 고딕"/>
+                <a:cs typeface="맑은 고딕"/>
               </a:rPr>
               <a:t>curl localhost:5000  →  "Hello, Cloud!" 확인</a:t>
             </a:r>
@@ -5334,6 +5366,8 @@
                   <a:srgbClr val="5B6373"/>
                 </a:solidFill>
                 <a:latin typeface="맑은 고딕"/>
+                <a:ea typeface="맑은 고딕"/>
+                <a:cs typeface="맑은 고딕"/>
               </a:rPr>
               <a:t>클라우드인프라관리  ·  3주차 2차시</a:t>
             </a:r>
@@ -5369,6 +5403,8 @@
                   <a:srgbClr val="5B6373"/>
                 </a:solidFill>
                 <a:latin typeface="맑은 고딕"/>
+                <a:ea typeface="맑은 고딕"/>
+                <a:cs typeface="맑은 고딕"/>
               </a:rPr>
               <a:t>10 / 13</a:t>
             </a:r>
@@ -5572,6 +5608,8 @@
                   <a:srgbClr val="14213D"/>
                 </a:solidFill>
                 <a:latin typeface="맑은 고딕"/>
+                <a:ea typeface="맑은 고딕"/>
+                <a:cs typeface="맑은 고딕"/>
               </a:rPr>
               <a:t>02</a:t>
             </a:r>
@@ -5607,6 +5645,8 @@
                   <a:srgbClr val="14B8A6"/>
                 </a:solidFill>
                 <a:latin typeface="맑은 고딕"/>
+                <a:ea typeface="맑은 고딕"/>
+                <a:cs typeface="맑은 고딕"/>
               </a:rPr>
               <a:t>실습 안내</a:t>
             </a:r>
@@ -5642,6 +5682,8 @@
                   <a:srgbClr val="FFFFFF"/>
                 </a:solidFill>
                 <a:latin typeface="맑은 고딕"/>
+                <a:ea typeface="맑은 고딕"/>
+                <a:cs typeface="맑은 고딕"/>
               </a:rPr>
               <a:t>VM 과제</a:t>
             </a:r>
@@ -5681,6 +5723,8 @@
                   <a:srgbClr val="0D9488"/>
                 </a:solidFill>
                 <a:latin typeface="맑은 고딕"/>
+                <a:ea typeface="맑은 고딕"/>
+                <a:cs typeface="맑은 고딕"/>
               </a:rPr>
               <a:t>●  </a:t>
             </a:r>
@@ -5690,6 +5734,8 @@
                   <a:srgbClr val="222733"/>
                 </a:solidFill>
                 <a:latin typeface="맑은 고딕"/>
+                <a:ea typeface="맑은 고딕"/>
+                <a:cs typeface="맑은 고딕"/>
               </a:rPr>
               <a:t>개인 VM에서 동일하게 app.py, Dockerfile 작성 후 빌드·실행</a:t>
             </a:r>
@@ -5706,6 +5752,8 @@
                   <a:srgbClr val="0D9488"/>
                 </a:solidFill>
                 <a:latin typeface="맑은 고딕"/>
+                <a:ea typeface="맑은 고딕"/>
+                <a:cs typeface="맑은 고딕"/>
               </a:rPr>
               <a:t>●  </a:t>
             </a:r>
@@ -5715,6 +5763,8 @@
                   <a:srgbClr val="222733"/>
                 </a:solidFill>
                 <a:latin typeface="맑은 고딕"/>
+                <a:ea typeface="맑은 고딕"/>
+                <a:cs typeface="맑은 고딕"/>
               </a:rPr>
               <a:t>curl 결과 캡처</a:t>
             </a:r>
@@ -5731,6 +5781,8 @@
                   <a:srgbClr val="0D9488"/>
                 </a:solidFill>
                 <a:latin typeface="맑은 고딕"/>
+                <a:ea typeface="맑은 고딕"/>
+                <a:cs typeface="맑은 고딕"/>
               </a:rPr>
               <a:t>●  </a:t>
             </a:r>
@@ -5740,6 +5792,8 @@
                   <a:srgbClr val="222733"/>
                 </a:solidFill>
                 <a:latin typeface="맑은 고딕"/>
+                <a:ea typeface="맑은 고딕"/>
+                <a:cs typeface="맑은 고딕"/>
               </a:rPr>
               <a:t>GitHub 저장소(cloud-lab)에 app.py·Dockerfile push (git add/commit/push)</a:t>
             </a:r>
@@ -5756,6 +5810,8 @@
                   <a:srgbClr val="0D9488"/>
                 </a:solidFill>
                 <a:latin typeface="맑은 고딕"/>
+                <a:ea typeface="맑은 고딕"/>
+                <a:cs typeface="맑은 고딕"/>
               </a:rPr>
               <a:t>●  </a:t>
             </a:r>
@@ -5765,6 +5821,8 @@
                   <a:srgbClr val="222733"/>
                 </a:solidFill>
                 <a:latin typeface="맑은 고딕"/>
+                <a:ea typeface="맑은 고딕"/>
+                <a:cs typeface="맑은 고딕"/>
               </a:rPr>
               <a:t>LMS 과제 게시판에 GitHub 링크 제출</a:t>
             </a:r>
@@ -5800,6 +5858,8 @@
                   <a:srgbClr val="5B6373"/>
                 </a:solidFill>
                 <a:latin typeface="맑은 고딕"/>
+                <a:ea typeface="맑은 고딕"/>
+                <a:cs typeface="맑은 고딕"/>
               </a:rPr>
               <a:t>클라우드인프라관리  ·  3주차 2차시</a:t>
             </a:r>
@@ -5835,6 +5895,8 @@
                   <a:srgbClr val="5B6373"/>
                 </a:solidFill>
                 <a:latin typeface="맑은 고딕"/>
+                <a:ea typeface="맑은 고딕"/>
+                <a:cs typeface="맑은 고딕"/>
               </a:rPr>
               <a:t>11 / 13</a:t>
             </a:r>
@@ -6020,6 +6082,8 @@
                   <a:srgbClr val="FFFFFF"/>
                 </a:solidFill>
                 <a:latin typeface="맑은 고딕"/>
+                <a:ea typeface="맑은 고딕"/>
+                <a:cs typeface="맑은 고딕"/>
               </a:rPr>
               <a:t>오늘의 정리</a:t>
             </a:r>
@@ -6073,6 +6137,8 @@
                   <a:srgbClr val="14213D"/>
                 </a:solidFill>
                 <a:latin typeface="맑은 고딕"/>
+                <a:ea typeface="맑은 고딕"/>
+                <a:cs typeface="맑은 고딕"/>
               </a:rPr>
               <a:t>1</a:t>
             </a:r>
@@ -6108,6 +6174,8 @@
                   <a:srgbClr val="FFFFFF"/>
                 </a:solidFill>
                 <a:latin typeface="맑은 고딕"/>
+                <a:ea typeface="맑은 고딕"/>
+                <a:cs typeface="맑은 고딕"/>
               </a:rPr>
               <a:t>GitHub·Docker Hub 계정 준비 완료</a:t>
             </a:r>
@@ -6161,6 +6229,8 @@
                   <a:srgbClr val="14213D"/>
                 </a:solidFill>
                 <a:latin typeface="맑은 고딕"/>
+                <a:ea typeface="맑은 고딕"/>
+                <a:cs typeface="맑은 고딕"/>
               </a:rPr>
               <a:t>2</a:t>
             </a:r>
@@ -6196,6 +6266,8 @@
                   <a:srgbClr val="FFFFFF"/>
                 </a:solidFill>
                 <a:latin typeface="맑은 고딕"/>
+                <a:ea typeface="맑은 고딕"/>
+                <a:cs typeface="맑은 고딕"/>
               </a:rPr>
               <a:t>나만의 Flask 앱을 Dockerfile로 빌드해 이미지로 만들었다</a:t>
             </a:r>
@@ -6337,6 +6409,8 @@
                   <a:srgbClr val="FFFFFF"/>
                 </a:solidFill>
                 <a:latin typeface="맑은 고딕"/>
+                <a:ea typeface="맑은 고딕"/>
+                <a:cs typeface="맑은 고딕"/>
               </a:rPr>
               <a:t>다음 차시 예고</a:t>
             </a:r>
@@ -6372,6 +6446,8 @@
                   <a:srgbClr val="14B8A6"/>
                 </a:solidFill>
                 <a:latin typeface="맑은 고딕"/>
+                <a:ea typeface="맑은 고딕"/>
+                <a:cs typeface="맑은 고딕"/>
               </a:rPr>
               <a:t>다음 차시 예고 — 3주차 3차시</a:t>
             </a:r>
@@ -6407,6 +6483,8 @@
                   <a:srgbClr val="FFFFFF"/>
                 </a:solidFill>
                 <a:latin typeface="맑은 고딕"/>
+                <a:ea typeface="맑은 고딕"/>
+                <a:cs typeface="맑은 고딕"/>
               </a:rPr>
               <a:t>오늘 만든 이미지를 더 작고 빠르게 최적화하는 방법을 배우고, (선택) Docker Hub에 직접 올려봅니다.</a:t>
             </a:r>
@@ -6548,6 +6626,8 @@
                   <a:srgbClr val="14B8A6"/>
                 </a:solidFill>
                 <a:latin typeface="맑은 고딕"/>
+                <a:ea typeface="맑은 고딕"/>
+                <a:cs typeface="맑은 고딕"/>
               </a:rPr>
               <a:t>SESSION OVERVIEW</a:t>
             </a:r>
@@ -6583,6 +6663,8 @@
                   <a:srgbClr val="FFFFFF"/>
                 </a:solidFill>
                 <a:latin typeface="맑은 고딕"/>
+                <a:ea typeface="맑은 고딕"/>
+                <a:cs typeface="맑은 고딕"/>
               </a:rPr>
               <a:t>오늘의 학습 목표</a:t>
             </a:r>
@@ -6622,6 +6704,8 @@
                   <a:srgbClr val="222733"/>
                 </a:solidFill>
                 <a:latin typeface="맑은 고딕"/>
+                <a:ea typeface="맑은 고딕"/>
+                <a:cs typeface="맑은 고딕"/>
               </a:rPr>
               <a:t>1.  GitHub·Docker Hub 계정을 준비한다</a:t>
             </a:r>
@@ -6638,6 +6722,8 @@
                   <a:srgbClr val="222733"/>
                 </a:solidFill>
                 <a:latin typeface="맑은 고딕"/>
+                <a:ea typeface="맑은 고딕"/>
+                <a:cs typeface="맑은 고딕"/>
               </a:rPr>
               <a:t>2.  간단한 Python Flask 앱을 작성한다</a:t>
             </a:r>
@@ -6654,6 +6740,8 @@
                   <a:srgbClr val="222733"/>
                 </a:solidFill>
                 <a:latin typeface="맑은 고딕"/>
+                <a:ea typeface="맑은 고딕"/>
+                <a:cs typeface="맑은 고딕"/>
               </a:rPr>
               <a:t>3.  그 앱을 Dockerfile로 빌드해 이미지로 만든다</a:t>
             </a:r>
@@ -6689,6 +6777,8 @@
                   <a:srgbClr val="5B6373"/>
                 </a:solidFill>
                 <a:latin typeface="맑은 고딕"/>
+                <a:ea typeface="맑은 고딕"/>
+                <a:cs typeface="맑은 고딕"/>
               </a:rPr>
               <a:t>클라우드인프라관리  ·  3주차 2차시</a:t>
             </a:r>
@@ -6724,6 +6814,8 @@
                   <a:srgbClr val="5B6373"/>
                 </a:solidFill>
                 <a:latin typeface="맑은 고딕"/>
+                <a:ea typeface="맑은 고딕"/>
+                <a:cs typeface="맑은 고딕"/>
               </a:rPr>
               <a:t>02 / 13</a:t>
             </a:r>
@@ -6909,6 +7001,8 @@
                   <a:srgbClr val="14B8A6"/>
                 </a:solidFill>
                 <a:latin typeface="맑은 고딕"/>
+                <a:ea typeface="맑은 고딕"/>
+                <a:cs typeface="맑은 고딕"/>
               </a:rPr>
               <a:t>SESSION OVERVIEW</a:t>
             </a:r>
@@ -6944,6 +7038,8 @@
                   <a:srgbClr val="FFFFFF"/>
                 </a:solidFill>
                 <a:latin typeface="맑은 고딕"/>
+                <a:ea typeface="맑은 고딕"/>
+                <a:cs typeface="맑은 고딕"/>
               </a:rPr>
               <a:t>오늘의 진행 순서</a:t>
             </a:r>
@@ -7155,6 +7251,8 @@
                   <a:srgbClr val="FFFFFF"/>
                 </a:solidFill>
                 <a:latin typeface="맑은 고딕"/>
+                <a:ea typeface="맑은 고딕"/>
+                <a:cs typeface="맑은 고딕"/>
               </a:rPr>
               <a:t>1</a:t>
             </a:r>
@@ -7238,6 +7336,8 @@
                   <a:srgbClr val="14213D"/>
                 </a:solidFill>
                 <a:latin typeface="맑은 고딕"/>
+                <a:ea typeface="맑은 고딕"/>
+                <a:cs typeface="맑은 고딕"/>
               </a:rPr>
               <a:t>개념 설명</a:t>
             </a:r>
@@ -7277,6 +7377,8 @@
                   <a:srgbClr val="222733"/>
                 </a:solidFill>
                 <a:latin typeface="맑은 고딕"/>
+                <a:ea typeface="맑은 고딕"/>
+                <a:cs typeface="맑은 고딕"/>
               </a:rPr>
               <a:t>계정 준비+Flask·Dockerfile 강의</a:t>
             </a:r>
@@ -7356,6 +7458,8 @@
                   <a:srgbClr val="FFFFFF"/>
                 </a:solidFill>
                 <a:latin typeface="맑은 고딕"/>
+                <a:ea typeface="맑은 고딕"/>
+                <a:cs typeface="맑은 고딕"/>
               </a:rPr>
               <a:t>2</a:t>
             </a:r>
@@ -7439,6 +7543,8 @@
                   <a:srgbClr val="14213D"/>
                 </a:solidFill>
                 <a:latin typeface="맑은 고딕"/>
+                <a:ea typeface="맑은 고딕"/>
+                <a:cs typeface="맑은 고딕"/>
               </a:rPr>
               <a:t>Killercoda</a:t>
             </a:r>
@@ -7478,6 +7584,8 @@
                   <a:srgbClr val="222733"/>
                 </a:solidFill>
                 <a:latin typeface="맑은 고딕"/>
+                <a:ea typeface="맑은 고딕"/>
+                <a:cs typeface="맑은 고딕"/>
               </a:rPr>
               <a:t>Flask 앱 빌드 실습</a:t>
             </a:r>
@@ -7557,6 +7665,8 @@
                   <a:srgbClr val="FFFFFF"/>
                 </a:solidFill>
                 <a:latin typeface="맑은 고딕"/>
+                <a:ea typeface="맑은 고딕"/>
+                <a:cs typeface="맑은 고딕"/>
               </a:rPr>
               <a:t>3</a:t>
             </a:r>
@@ -7640,6 +7750,8 @@
                   <a:srgbClr val="14213D"/>
                 </a:solidFill>
                 <a:latin typeface="맑은 고딕"/>
+                <a:ea typeface="맑은 고딕"/>
+                <a:cs typeface="맑은 고딕"/>
               </a:rPr>
               <a:t>VM 안내</a:t>
             </a:r>
@@ -7679,6 +7791,8 @@
                   <a:srgbClr val="222733"/>
                 </a:solidFill>
                 <a:latin typeface="맑은 고딕"/>
+                <a:ea typeface="맑은 고딕"/>
+                <a:cs typeface="맑은 고딕"/>
               </a:rPr>
               <a:t>VM 실습 안내</a:t>
             </a:r>
@@ -7758,6 +7872,8 @@
                   <a:srgbClr val="FFFFFF"/>
                 </a:solidFill>
                 <a:latin typeface="맑은 고딕"/>
+                <a:ea typeface="맑은 고딕"/>
+                <a:cs typeface="맑은 고딕"/>
               </a:rPr>
               <a:t>4</a:t>
             </a:r>
@@ -7841,6 +7957,8 @@
                   <a:srgbClr val="14213D"/>
                 </a:solidFill>
                 <a:latin typeface="맑은 고딕"/>
+                <a:ea typeface="맑은 고딕"/>
+                <a:cs typeface="맑은 고딕"/>
               </a:rPr>
               <a:t>결과 제출</a:t>
             </a:r>
@@ -7880,6 +7998,8 @@
                   <a:srgbClr val="222733"/>
                 </a:solidFill>
                 <a:latin typeface="맑은 고딕"/>
+                <a:ea typeface="맑은 고딕"/>
+                <a:cs typeface="맑은 고딕"/>
               </a:rPr>
               <a:t>체크리스트 제출</a:t>
             </a:r>
@@ -7915,6 +8035,8 @@
                   <a:srgbClr val="5B6373"/>
                 </a:solidFill>
                 <a:latin typeface="맑은 고딕"/>
+                <a:ea typeface="맑은 고딕"/>
+                <a:cs typeface="맑은 고딕"/>
               </a:rPr>
               <a:t>클라우드인프라관리  ·  3주차 2차시</a:t>
             </a:r>
@@ -7950,6 +8072,8 @@
                   <a:srgbClr val="5B6373"/>
                 </a:solidFill>
                 <a:latin typeface="맑은 고딕"/>
+                <a:ea typeface="맑은 고딕"/>
+                <a:cs typeface="맑은 고딕"/>
               </a:rPr>
               <a:t>03 / 13</a:t>
             </a:r>
@@ -8153,6 +8277,8 @@
                   <a:srgbClr val="14213D"/>
                 </a:solidFill>
                 <a:latin typeface="맑은 고딕"/>
+                <a:ea typeface="맑은 고딕"/>
+                <a:cs typeface="맑은 고딕"/>
               </a:rPr>
               <a:t>PART 00</a:t>
             </a:r>
@@ -8188,6 +8314,8 @@
                   <a:srgbClr val="FFFFFF"/>
                 </a:solidFill>
                 <a:latin typeface="맑은 고딕"/>
+                <a:ea typeface="맑은 고딕"/>
+                <a:cs typeface="맑은 고딕"/>
               </a:rPr>
               <a:t>계정 준비</a:t>
             </a:r>
@@ -8223,6 +8351,8 @@
                   <a:srgbClr val="C9D3E6"/>
                 </a:solidFill>
                 <a:latin typeface="맑은 고딕"/>
+                <a:ea typeface="맑은 고딕"/>
+                <a:cs typeface="맑은 고딕"/>
               </a:rPr>
               <a:t>GitHub · Docker Hub 단계별 가입</a:t>
             </a:r>
@@ -8382,6 +8512,8 @@
                   <a:srgbClr val="14213D"/>
                 </a:solidFill>
                 <a:latin typeface="맑은 고딕"/>
+                <a:ea typeface="맑은 고딕"/>
+                <a:cs typeface="맑은 고딕"/>
               </a:rPr>
               <a:t>00</a:t>
             </a:r>
@@ -8417,6 +8549,8 @@
                   <a:srgbClr val="14B8A6"/>
                 </a:solidFill>
                 <a:latin typeface="맑은 고딕"/>
+                <a:ea typeface="맑은 고딕"/>
+                <a:cs typeface="맑은 고딕"/>
               </a:rPr>
               <a:t>PART 0 · 계정 준비</a:t>
             </a:r>
@@ -8452,6 +8586,8 @@
                   <a:srgbClr val="FFFFFF"/>
                 </a:solidFill>
                 <a:latin typeface="맑은 고딕"/>
+                <a:ea typeface="맑은 고딕"/>
+                <a:cs typeface="맑은 고딕"/>
               </a:rPr>
               <a:t>GitHub 가입 (이미 있으면 건너뛰기)</a:t>
             </a:r>
@@ -8491,6 +8627,8 @@
                   <a:srgbClr val="222733"/>
                 </a:solidFill>
                 <a:latin typeface="맑은 고딕"/>
+                <a:ea typeface="맑은 고딕"/>
+                <a:cs typeface="맑은 고딕"/>
               </a:rPr>
               <a:t>① github.com 접속 → Sign up 클릭</a:t>
             </a:r>
@@ -8507,6 +8645,8 @@
                   <a:srgbClr val="222733"/>
                 </a:solidFill>
                 <a:latin typeface="맑은 고딕"/>
+                <a:ea typeface="맑은 고딕"/>
+                <a:cs typeface="맑은 고딕"/>
               </a:rPr>
               <a:t>② 이메일·비밀번호·사용자명 입력 후 계정 생성</a:t>
             </a:r>
@@ -8523,6 +8663,8 @@
                   <a:srgbClr val="222733"/>
                 </a:solidFill>
                 <a:latin typeface="맑은 고딕"/>
+                <a:ea typeface="맑은 고딕"/>
+                <a:cs typeface="맑은 고딕"/>
               </a:rPr>
               <a:t>③ 이메일 인증 완료</a:t>
             </a:r>
@@ -8539,6 +8681,8 @@
                   <a:srgbClr val="222733"/>
                 </a:solidFill>
                 <a:latin typeface="맑은 고딕"/>
+                <a:ea typeface="맑은 고딕"/>
+                <a:cs typeface="맑은 고딕"/>
               </a:rPr>
               <a:t>④ 로그인 후 우측 상단 '+' → New repository 로 저장소 하나 생성(예: cloud-lab)</a:t>
             </a:r>
@@ -8574,6 +8718,8 @@
                   <a:srgbClr val="5B6373"/>
                 </a:solidFill>
                 <a:latin typeface="맑은 고딕"/>
+                <a:ea typeface="맑은 고딕"/>
+                <a:cs typeface="맑은 고딕"/>
               </a:rPr>
               <a:t>클라우드인프라관리  ·  3주차 2차시</a:t>
             </a:r>
@@ -8609,6 +8755,8 @@
                   <a:srgbClr val="5B6373"/>
                 </a:solidFill>
                 <a:latin typeface="맑은 고딕"/>
+                <a:ea typeface="맑은 고딕"/>
+                <a:cs typeface="맑은 고딕"/>
               </a:rPr>
               <a:t>05 / 13</a:t>
             </a:r>
@@ -8812,6 +8960,8 @@
                   <a:srgbClr val="14213D"/>
                 </a:solidFill>
                 <a:latin typeface="맑은 고딕"/>
+                <a:ea typeface="맑은 고딕"/>
+                <a:cs typeface="맑은 고딕"/>
               </a:rPr>
               <a:t>00</a:t>
             </a:r>
@@ -8847,6 +8997,8 @@
                   <a:srgbClr val="14B8A6"/>
                 </a:solidFill>
                 <a:latin typeface="맑은 고딕"/>
+                <a:ea typeface="맑은 고딕"/>
+                <a:cs typeface="맑은 고딕"/>
               </a:rPr>
               <a:t>PART 0 · 계정 준비</a:t>
             </a:r>
@@ -8882,6 +9034,8 @@
                   <a:srgbClr val="FFFFFF"/>
                 </a:solidFill>
                 <a:latin typeface="맑은 고딕"/>
+                <a:ea typeface="맑은 고딕"/>
+                <a:cs typeface="맑은 고딕"/>
               </a:rPr>
               <a:t>Docker Hub 가입 (이미 있으면 건너뛰기)</a:t>
             </a:r>
@@ -8921,6 +9075,8 @@
                   <a:srgbClr val="222733"/>
                 </a:solidFill>
                 <a:latin typeface="맑은 고딕"/>
+                <a:ea typeface="맑은 고딕"/>
+                <a:cs typeface="맑은 고딕"/>
               </a:rPr>
               <a:t>① hub.docker.com 접속 → Sign Up 클릭</a:t>
             </a:r>
@@ -8937,6 +9093,8 @@
                   <a:srgbClr val="222733"/>
                 </a:solidFill>
                 <a:latin typeface="맑은 고딕"/>
+                <a:ea typeface="맑은 고딕"/>
+                <a:cs typeface="맑은 고딕"/>
               </a:rPr>
               <a:t>② 이메일·비밀번호·Docker ID(사용자명) 입력 후 계정 생성</a:t>
             </a:r>
@@ -8953,6 +9111,8 @@
                   <a:srgbClr val="222733"/>
                 </a:solidFill>
                 <a:latin typeface="맑은 고딕"/>
+                <a:ea typeface="맑은 고딕"/>
+                <a:cs typeface="맑은 고딕"/>
               </a:rPr>
               <a:t>③ 이메일 인증 완료</a:t>
             </a:r>
@@ -8969,6 +9129,8 @@
                   <a:srgbClr val="222733"/>
                 </a:solidFill>
                 <a:latin typeface="맑은 고딕"/>
+                <a:ea typeface="맑은 고딕"/>
+                <a:cs typeface="맑은 고딕"/>
               </a:rPr>
               <a:t>④ Docker ID를 꼭 기억해두기 (오늘 실습에서 {dockerhub_id}로 사용)</a:t>
             </a:r>
@@ -9004,6 +9166,8 @@
                   <a:srgbClr val="5B6373"/>
                 </a:solidFill>
                 <a:latin typeface="맑은 고딕"/>
+                <a:ea typeface="맑은 고딕"/>
+                <a:cs typeface="맑은 고딕"/>
               </a:rPr>
               <a:t>클라우드인프라관리  ·  3주차 2차시</a:t>
             </a:r>
@@ -9039,6 +9203,8 @@
                   <a:srgbClr val="5B6373"/>
                 </a:solidFill>
                 <a:latin typeface="맑은 고딕"/>
+                <a:ea typeface="맑은 고딕"/>
+                <a:cs typeface="맑은 고딕"/>
               </a:rPr>
               <a:t>06 / 13</a:t>
             </a:r>
@@ -9242,6 +9408,8 @@
                   <a:srgbClr val="14213D"/>
                 </a:solidFill>
                 <a:latin typeface="맑은 고딕"/>
+                <a:ea typeface="맑은 고딕"/>
+                <a:cs typeface="맑은 고딕"/>
               </a:rPr>
               <a:t>PART 01</a:t>
             </a:r>
@@ -9277,6 +9445,8 @@
                   <a:srgbClr val="FFFFFF"/>
                 </a:solidFill>
                 <a:latin typeface="맑은 고딕"/>
+                <a:ea typeface="맑은 고딕"/>
+                <a:cs typeface="맑은 고딕"/>
               </a:rPr>
               <a:t>Flask 앱 만들기</a:t>
             </a:r>
@@ -9312,6 +9482,8 @@
                   <a:srgbClr val="C9D3E6"/>
                 </a:solidFill>
                 <a:latin typeface="맑은 고딕"/>
+                <a:ea typeface="맑은 고딕"/>
+                <a:cs typeface="맑은 고딕"/>
               </a:rPr>
               <a:t>5줄짜리 최소 웹 서버</a:t>
             </a:r>
@@ -9471,6 +9643,8 @@
                   <a:srgbClr val="14213D"/>
                 </a:solidFill>
                 <a:latin typeface="맑은 고딕"/>
+                <a:ea typeface="맑은 고딕"/>
+                <a:cs typeface="맑은 고딕"/>
               </a:rPr>
               <a:t>01</a:t>
             </a:r>
@@ -9506,6 +9680,8 @@
                   <a:srgbClr val="14B8A6"/>
                 </a:solidFill>
                 <a:latin typeface="맑은 고딕"/>
+                <a:ea typeface="맑은 고딕"/>
+                <a:cs typeface="맑은 고딕"/>
               </a:rPr>
               <a:t>PART 1 · Flask 앱 만들기</a:t>
             </a:r>
@@ -9541,6 +9717,8 @@
                   <a:srgbClr val="FFFFFF"/>
                 </a:solidFill>
                 <a:latin typeface="맑은 고딕"/>
+                <a:ea typeface="맑은 고딕"/>
+                <a:cs typeface="맑은 고딕"/>
               </a:rPr>
               <a:t>app.py — 최소한의 웹 서버</a:t>
             </a:r>
@@ -9580,6 +9758,8 @@
                   <a:srgbClr val="0D9488"/>
                 </a:solidFill>
                 <a:latin typeface="맑은 고딕"/>
+                <a:ea typeface="맑은 고딕"/>
+                <a:cs typeface="맑은 고딕"/>
               </a:rPr>
               <a:t>●  </a:t>
             </a:r>
@@ -9589,6 +9769,8 @@
                   <a:srgbClr val="222733"/>
                 </a:solidFill>
                 <a:latin typeface="맑은 고딕"/>
+                <a:ea typeface="맑은 고딕"/>
+                <a:cs typeface="맑은 고딕"/>
               </a:rPr>
               <a:t>Flask는 파이썬으로 웹 서버를 아주 간단하게 만들 수 있는 라이브러리</a:t>
             </a:r>
@@ -9605,6 +9787,8 @@
                   <a:srgbClr val="0D9488"/>
                 </a:solidFill>
                 <a:latin typeface="맑은 고딕"/>
+                <a:ea typeface="맑은 고딕"/>
+                <a:cs typeface="맑은 고딕"/>
               </a:rPr>
               <a:t>●  </a:t>
             </a:r>
@@ -9614,6 +9798,8 @@
                   <a:srgbClr val="222733"/>
                 </a:solidFill>
                 <a:latin typeface="맑은 고딕"/>
+                <a:ea typeface="맑은 고딕"/>
+                <a:cs typeface="맑은 고딕"/>
               </a:rPr>
               <a:t>"/" 경로로 접속하면 문자열 하나를 응답하는 게 전부인 최소 예제</a:t>
             </a:r>
@@ -9630,6 +9816,8 @@
                   <a:srgbClr val="0D9488"/>
                 </a:solidFill>
                 <a:latin typeface="맑은 고딕"/>
+                <a:ea typeface="맑은 고딕"/>
+                <a:cs typeface="맑은 고딕"/>
               </a:rPr>
               <a:t>●  </a:t>
             </a:r>
@@ -9639,6 +9827,8 @@
                   <a:srgbClr val="222733"/>
                 </a:solidFill>
                 <a:latin typeface="맑은 고딕"/>
+                <a:ea typeface="맑은 고딕"/>
+                <a:cs typeface="맑은 고딕"/>
               </a:rPr>
               <a:t>코드를 외울 필요 없음 — 그대로 복사해서 사용</a:t>
             </a:r>
@@ -9674,6 +9864,8 @@
                   <a:srgbClr val="5B6373"/>
                 </a:solidFill>
                 <a:latin typeface="맑은 고딕"/>
+                <a:ea typeface="맑은 고딕"/>
+                <a:cs typeface="맑은 고딕"/>
               </a:rPr>
               <a:t>클라우드인프라관리  ·  3주차 2차시</a:t>
             </a:r>
@@ -9709,6 +9901,8 @@
                   <a:srgbClr val="5B6373"/>
                 </a:solidFill>
                 <a:latin typeface="맑은 고딕"/>
+                <a:ea typeface="맑은 고딕"/>
+                <a:cs typeface="맑은 고딕"/>
               </a:rPr>
               <a:t>08 / 13</a:t>
             </a:r>
@@ -9912,6 +10106,8 @@
                   <a:srgbClr val="14213D"/>
                 </a:solidFill>
                 <a:latin typeface="맑은 고딕"/>
+                <a:ea typeface="맑은 고딕"/>
+                <a:cs typeface="맑은 고딕"/>
               </a:rPr>
               <a:t>01</a:t>
             </a:r>
@@ -9947,6 +10143,8 @@
                   <a:srgbClr val="14B8A6"/>
                 </a:solidFill>
                 <a:latin typeface="맑은 고딕"/>
+                <a:ea typeface="맑은 고딕"/>
+                <a:cs typeface="맑은 고딕"/>
               </a:rPr>
               <a:t>PART 1 · Flask 앱 만들기</a:t>
             </a:r>
@@ -9982,6 +10180,8 @@
                   <a:srgbClr val="FFFFFF"/>
                 </a:solidFill>
                 <a:latin typeface="맑은 고딕"/>
+                <a:ea typeface="맑은 고딕"/>
+                <a:cs typeface="맑은 고딕"/>
               </a:rPr>
               <a:t>Dockerfile 작성</a:t>
             </a:r>
@@ -10021,6 +10221,8 @@
                   <a:srgbClr val="0D9488"/>
                 </a:solidFill>
                 <a:latin typeface="맑은 고딕"/>
+                <a:ea typeface="맑은 고딕"/>
+                <a:cs typeface="맑은 고딕"/>
               </a:rPr>
               <a:t>●  </a:t>
             </a:r>
@@ -10030,6 +10232,8 @@
                   <a:srgbClr val="222733"/>
                 </a:solidFill>
                 <a:latin typeface="맑은 고딕"/>
+                <a:ea typeface="맑은 고딕"/>
+                <a:cs typeface="맑은 고딕"/>
               </a:rPr>
               <a:t>FROM python:3.11-slim</a:t>
             </a:r>
@@ -10046,6 +10250,8 @@
                   <a:srgbClr val="0D9488"/>
                 </a:solidFill>
                 <a:latin typeface="맑은 고딕"/>
+                <a:ea typeface="맑은 고딕"/>
+                <a:cs typeface="맑은 고딕"/>
               </a:rPr>
               <a:t>●  </a:t>
             </a:r>
@@ -10055,6 +10261,8 @@
                   <a:srgbClr val="222733"/>
                 </a:solidFill>
                 <a:latin typeface="맑은 고딕"/>
+                <a:ea typeface="맑은 고딕"/>
+                <a:cs typeface="맑은 고딕"/>
               </a:rPr>
               <a:t>WORKDIR /app</a:t>
             </a:r>
@@ -10071,6 +10279,8 @@
                   <a:srgbClr val="0D9488"/>
                 </a:solidFill>
                 <a:latin typeface="맑은 고딕"/>
+                <a:ea typeface="맑은 고딕"/>
+                <a:cs typeface="맑은 고딕"/>
               </a:rPr>
               <a:t>●  </a:t>
             </a:r>
@@ -10080,6 +10290,8 @@
                   <a:srgbClr val="222733"/>
                 </a:solidFill>
                 <a:latin typeface="맑은 고딕"/>
+                <a:ea typeface="맑은 고딕"/>
+                <a:cs typeface="맑은 고딕"/>
               </a:rPr>
               <a:t>COPY app.py .</a:t>
             </a:r>
@@ -10096,6 +10308,8 @@
                   <a:srgbClr val="0D9488"/>
                 </a:solidFill>
                 <a:latin typeface="맑은 고딕"/>
+                <a:ea typeface="맑은 고딕"/>
+                <a:cs typeface="맑은 고딕"/>
               </a:rPr>
               <a:t>●  </a:t>
             </a:r>
@@ -10105,6 +10319,8 @@
                   <a:srgbClr val="222733"/>
                 </a:solidFill>
                 <a:latin typeface="맑은 고딕"/>
+                <a:ea typeface="맑은 고딕"/>
+                <a:cs typeface="맑은 고딕"/>
               </a:rPr>
               <a:t>RUN pip install flask</a:t>
             </a:r>
@@ -10121,6 +10337,8 @@
                   <a:srgbClr val="0D9488"/>
                 </a:solidFill>
                 <a:latin typeface="맑은 고딕"/>
+                <a:ea typeface="맑은 고딕"/>
+                <a:cs typeface="맑은 고딕"/>
               </a:rPr>
               <a:t>●  </a:t>
             </a:r>
@@ -10130,6 +10348,8 @@
                   <a:srgbClr val="222733"/>
                 </a:solidFill>
                 <a:latin typeface="맑은 고딕"/>
+                <a:ea typeface="맑은 고딕"/>
+                <a:cs typeface="맑은 고딕"/>
               </a:rPr>
               <a:t>EXPOSE 5000</a:t>
             </a:r>
@@ -10146,6 +10366,8 @@
                   <a:srgbClr val="0D9488"/>
                 </a:solidFill>
                 <a:latin typeface="맑은 고딕"/>
+                <a:ea typeface="맑은 고딕"/>
+                <a:cs typeface="맑은 고딕"/>
               </a:rPr>
               <a:t>●  </a:t>
             </a:r>
@@ -10155,6 +10377,8 @@
                   <a:srgbClr val="222733"/>
                 </a:solidFill>
                 <a:latin typeface="맑은 고딕"/>
+                <a:ea typeface="맑은 고딕"/>
+                <a:cs typeface="맑은 고딕"/>
               </a:rPr>
               <a:t>CMD ["python", "app.py"]</a:t>
             </a:r>
@@ -10190,6 +10414,8 @@
                   <a:srgbClr val="5B6373"/>
                 </a:solidFill>
                 <a:latin typeface="맑은 고딕"/>
+                <a:ea typeface="맑은 고딕"/>
+                <a:cs typeface="맑은 고딕"/>
               </a:rPr>
               <a:t>클라우드인프라관리  ·  3주차 2차시</a:t>
             </a:r>
@@ -10225,6 +10451,8 @@
                   <a:srgbClr val="5B6373"/>
                 </a:solidFill>
                 <a:latin typeface="맑은 고딕"/>
+                <a:ea typeface="맑은 고딕"/>
+                <a:cs typeface="맑은 고딕"/>
               </a:rPr>
               <a:t>09 / 13</a:t>
             </a:r>
